--- a/templates/office/Phase0_제안발표_PT_슬라이드.pptx
+++ b/templates/office/Phase0_제안발표_PT_슬라이드.pptx
@@ -3181,7 +3181,7 @@
               </a:defRPr>
             </a:pPr>
             <a:r>
-              <a:t>[제안 발표회] 제안 발표 PT</a:t>
+              <a:t>[한빛글로벌 입찰 제안발표회] SyncGuard AI 구축 제안 PT</a:t>
             </a:r>
           </a:p>
           <a:p>
@@ -3197,7 +3197,7 @@
               </a:defRPr>
             </a:pPr>
             <a:r>
-              <a:t>성공적인 시스템 구축을 위한 엠파시만의 3대 핵심 차별화 역량</a:t>
+              <a:t>표시·광고 규제 심의 리드타임 85% 단축 및 골든셋 정밀도 96.4% 실증 역량</a:t>
             </a:r>
           </a:p>
           <a:p>

--- a/templates/office/Phase0_제안발표_PT_슬라이드.pptx
+++ b/templates/office/Phase0_제안발표_PT_슬라이드.pptx
@@ -3106,7 +3106,7 @@
             <a:avLst/>
           </a:prstGeom>
           <a:solidFill>
-            <a:srgbClr val="1E293B"/>
+            <a:srgbClr val="0F2942"/>
           </a:solidFill>
           <a:ln>
             <a:noFill/>
@@ -3181,7 +3181,7 @@
               </a:defRPr>
             </a:pPr>
             <a:r>
-              <a:t>[한빛글로벌 입찰 제안발표회] SyncGuard AI 구축 제안 PT</a:t>
+              <a:t>[한빛글로벌 입찰 제안발표회] SyncFlow AI 구축 제안 PT</a:t>
             </a:r>
           </a:p>
           <a:p>
@@ -3197,7 +3197,7 @@
               </a:defRPr>
             </a:pPr>
             <a:r>
-              <a:t>표시·광고 규제 심의 리드타임 85% 단축 및 골든셋 정밀도 96.4% 실증 역량</a:t>
+              <a:t>계약·기술규격 규제 검증 리드타임 85% 단축 및 골든셋 정밀도 96.4% 시험검증 역량</a:t>
             </a:r>
           </a:p>
           <a:p>
@@ -3306,7 +3306,7 @@
             <a:pPr>
               <a:defRPr sz="2200" b="1">
                 <a:solidFill>
-                  <a:srgbClr val="1E293B"/>
+                  <a:srgbClr val="0F2942"/>
                 </a:solidFill>
                 <a:latin typeface="Malgun Gothic"/>
               </a:defRPr>
@@ -3348,7 +3348,7 @@
               </a:spcAft>
               <a:defRPr sz="1400">
                 <a:solidFill>
-                  <a:srgbClr val="334155"/>
+                  <a:srgbClr val="1E3A5F"/>
                 </a:solidFill>
                 <a:latin typeface="Malgun Gothic"/>
               </a:defRPr>
@@ -3367,13 +3367,13 @@
               </a:spcAft>
               <a:defRPr sz="1400">
                 <a:solidFill>
-                  <a:srgbClr val="334155"/>
+                  <a:srgbClr val="1E3A5F"/>
                 </a:solidFill>
                 <a:latin typeface="Malgun Gothic"/>
               </a:defRPr>
             </a:pPr>
             <a:r>
-              <a:t>•  2. 기술 차별성: 검증된 SyncVerse 코어 엔진 및 사전 PoC 실증 결과</a:t>
+              <a:t>•  2. 기술 차별성: 검증된 SyncVerse 코어 엔진 및 사전 PoC 시험검증 결과</a:t>
             </a:r>
           </a:p>
           <a:p>
@@ -3386,7 +3386,7 @@
               </a:spcAft>
               <a:defRPr sz="1400">
                 <a:solidFill>
-                  <a:srgbClr val="334155"/>
+                  <a:srgbClr val="1E3A5F"/>
                 </a:solidFill>
                 <a:latin typeface="Malgun Gothic"/>
               </a:defRPr>
@@ -3405,7 +3405,7 @@
               </a:spcAft>
               <a:defRPr sz="1400">
                 <a:solidFill>
-                  <a:srgbClr val="334155"/>
+                  <a:srgbClr val="1E3A5F"/>
                 </a:solidFill>
                 <a:latin typeface="Malgun Gothic"/>
               </a:defRPr>
@@ -3504,13 +3504,13 @@
             <a:pPr>
               <a:defRPr sz="2200" b="1">
                 <a:solidFill>
-                  <a:srgbClr val="1E293B"/>
+                  <a:srgbClr val="0F2942"/>
                 </a:solidFill>
                 <a:latin typeface="Malgun Gothic"/>
               </a:defRPr>
             </a:pPr>
             <a:r>
-              <a:t>핵심 기술 차별성: 사전 PoC 실증 완료</a:t>
+              <a:t>핵심 기술 차별성: 사전 PoC 시험검증 완료</a:t>
             </a:r>
           </a:p>
         </p:txBody>
@@ -3558,7 +3558,7 @@
                   </a:txBody>
                   <a:tcPr>
                     <a:solidFill>
-                      <a:srgbClr val="1E293B"/>
+                      <a:srgbClr val="0F2942"/>
                     </a:solidFill>
                   </a:tcPr>
                 </a:tc>
@@ -3580,7 +3580,7 @@
                   </a:txBody>
                   <a:tcPr>
                     <a:solidFill>
-                      <a:srgbClr val="1E293B"/>
+                      <a:srgbClr val="0F2942"/>
                     </a:solidFill>
                   </a:tcPr>
                 </a:tc>
@@ -3596,13 +3596,13 @@
                           </a:solidFill>
                           <a:latin typeface="Malgun Gothic"/>
                         </a:rPr>
-                        <a:t>당사 PoC 실증 결과</a:t>
+                        <a:t>당사 PoC 시험검증 결과</a:t>
                       </a:r>
                     </a:p>
                   </a:txBody>
                   <a:tcPr>
                     <a:solidFill>
-                      <a:srgbClr val="1E293B"/>
+                      <a:srgbClr val="0F2942"/>
                     </a:solidFill>
                   </a:tcPr>
                 </a:tc>
@@ -3624,7 +3624,7 @@
                   </a:txBody>
                   <a:tcPr>
                     <a:solidFill>
-                      <a:srgbClr val="1E293B"/>
+                      <a:srgbClr val="0F2942"/>
                     </a:solidFill>
                   </a:tcPr>
                 </a:tc>
@@ -3638,7 +3638,7 @@
                       <a:r>
                         <a:rPr sz="1100">
                           <a:solidFill>
-                            <a:srgbClr val="334155"/>
+                            <a:srgbClr val="1E3A5F"/>
                           </a:solidFill>
                           <a:latin typeface="Malgun Gothic"/>
                         </a:rPr>
@@ -3660,7 +3660,7 @@
                       <a:r>
                         <a:rPr sz="1100">
                           <a:solidFill>
-                            <a:srgbClr val="334155"/>
+                            <a:srgbClr val="1E3A5F"/>
                           </a:solidFill>
                           <a:latin typeface="Malgun Gothic"/>
                         </a:rPr>
@@ -3682,7 +3682,7 @@
                       <a:r>
                         <a:rPr sz="1100">
                           <a:solidFill>
-                            <a:srgbClr val="334155"/>
+                            <a:srgbClr val="1E3A5F"/>
                           </a:solidFill>
                           <a:latin typeface="Malgun Gothic"/>
                         </a:rPr>
@@ -3704,7 +3704,7 @@
                       <a:r>
                         <a:rPr sz="1100">
                           <a:solidFill>
-                            <a:srgbClr val="334155"/>
+                            <a:srgbClr val="1E3A5F"/>
                           </a:solidFill>
                           <a:latin typeface="Malgun Gothic"/>
                         </a:rPr>
@@ -3728,7 +3728,7 @@
                       <a:r>
                         <a:rPr sz="1100">
                           <a:solidFill>
-                            <a:srgbClr val="334155"/>
+                            <a:srgbClr val="1E3A5F"/>
                           </a:solidFill>
                           <a:latin typeface="Malgun Gothic"/>
                         </a:rPr>
@@ -3750,7 +3750,7 @@
                       <a:r>
                         <a:rPr sz="1100">
                           <a:solidFill>
-                            <a:srgbClr val="334155"/>
+                            <a:srgbClr val="1E3A5F"/>
                           </a:solidFill>
                           <a:latin typeface="Malgun Gothic"/>
                         </a:rPr>
@@ -3772,7 +3772,7 @@
                       <a:r>
                         <a:rPr sz="1100">
                           <a:solidFill>
-                            <a:srgbClr val="334155"/>
+                            <a:srgbClr val="1E3A5F"/>
                           </a:solidFill>
                           <a:latin typeface="Malgun Gothic"/>
                         </a:rPr>
@@ -3794,7 +3794,7 @@
                       <a:r>
                         <a:rPr sz="1100">
                           <a:solidFill>
-                            <a:srgbClr val="334155"/>
+                            <a:srgbClr val="1E3A5F"/>
                           </a:solidFill>
                           <a:latin typeface="Malgun Gothic"/>
                         </a:rPr>
@@ -3818,7 +3818,7 @@
                       <a:r>
                         <a:rPr sz="1100">
                           <a:solidFill>
-                            <a:srgbClr val="334155"/>
+                            <a:srgbClr val="1E3A5F"/>
                           </a:solidFill>
                           <a:latin typeface="Malgun Gothic"/>
                         </a:rPr>
@@ -3840,7 +3840,7 @@
                       <a:r>
                         <a:rPr sz="1100">
                           <a:solidFill>
-                            <a:srgbClr val="334155"/>
+                            <a:srgbClr val="1E3A5F"/>
                           </a:solidFill>
                           <a:latin typeface="Malgun Gothic"/>
                         </a:rPr>
@@ -3862,7 +3862,7 @@
                       <a:r>
                         <a:rPr sz="1100">
                           <a:solidFill>
-                            <a:srgbClr val="334155"/>
+                            <a:srgbClr val="1E3A5F"/>
                           </a:solidFill>
                           <a:latin typeface="Malgun Gothic"/>
                         </a:rPr>
@@ -3884,7 +3884,7 @@
                       <a:r>
                         <a:rPr sz="1100">
                           <a:solidFill>
-                            <a:srgbClr val="334155"/>
+                            <a:srgbClr val="1E3A5F"/>
                           </a:solidFill>
                           <a:latin typeface="Malgun Gothic"/>
                         </a:rPr>
@@ -3908,7 +3908,7 @@
                       <a:r>
                         <a:rPr sz="1100">
                           <a:solidFill>
-                            <a:srgbClr val="334155"/>
+                            <a:srgbClr val="1E3A5F"/>
                           </a:solidFill>
                           <a:latin typeface="Malgun Gothic"/>
                         </a:rPr>
@@ -3930,7 +3930,7 @@
                       <a:r>
                         <a:rPr sz="1100">
                           <a:solidFill>
-                            <a:srgbClr val="334155"/>
+                            <a:srgbClr val="1E3A5F"/>
                           </a:solidFill>
                           <a:latin typeface="Malgun Gothic"/>
                         </a:rPr>
@@ -3952,7 +3952,7 @@
                       <a:r>
                         <a:rPr sz="1100">
                           <a:solidFill>
-                            <a:srgbClr val="334155"/>
+                            <a:srgbClr val="1E3A5F"/>
                           </a:solidFill>
                           <a:latin typeface="Malgun Gothic"/>
                         </a:rPr>
@@ -3974,7 +3974,7 @@
                       <a:r>
                         <a:rPr sz="1100">
                           <a:solidFill>
-                            <a:srgbClr val="334155"/>
+                            <a:srgbClr val="1E3A5F"/>
                           </a:solidFill>
                           <a:latin typeface="Malgun Gothic"/>
                         </a:rPr>
@@ -4081,7 +4081,7 @@
             <a:pPr>
               <a:defRPr sz="2200" b="1">
                 <a:solidFill>
-                  <a:srgbClr val="1E293B"/>
+                  <a:srgbClr val="0F2942"/>
                 </a:solidFill>
                 <a:latin typeface="Malgun Gothic"/>
               </a:defRPr>
@@ -4123,7 +4123,7 @@
               </a:spcAft>
               <a:defRPr sz="1400">
                 <a:solidFill>
-                  <a:srgbClr val="334155"/>
+                  <a:srgbClr val="1E3A5F"/>
                 </a:solidFill>
                 <a:latin typeface="Malgun Gothic"/>
               </a:defRPr>
@@ -4142,7 +4142,7 @@
               </a:spcAft>
               <a:defRPr sz="1400">
                 <a:solidFill>
-                  <a:srgbClr val="334155"/>
+                  <a:srgbClr val="1E3A5F"/>
                 </a:solidFill>
                 <a:latin typeface="Malgun Gothic"/>
               </a:defRPr>
@@ -4161,7 +4161,7 @@
               </a:spcAft>
               <a:defRPr sz="1400">
                 <a:solidFill>
-                  <a:srgbClr val="334155"/>
+                  <a:srgbClr val="1E3A5F"/>
                 </a:solidFill>
                 <a:latin typeface="Malgun Gothic"/>
               </a:defRPr>
@@ -4180,7 +4180,7 @@
               </a:spcAft>
               <a:defRPr sz="1400">
                 <a:solidFill>
-                  <a:srgbClr val="334155"/>
+                  <a:srgbClr val="1E3A5F"/>
                 </a:solidFill>
                 <a:latin typeface="Malgun Gothic"/>
               </a:defRPr>
@@ -4199,7 +4199,7 @@
               </a:spcAft>
               <a:defRPr sz="1400">
                 <a:solidFill>
-                  <a:srgbClr val="334155"/>
+                  <a:srgbClr val="1E3A5F"/>
                 </a:solidFill>
                 <a:latin typeface="Malgun Gothic"/>
               </a:defRPr>
@@ -4218,7 +4218,7 @@
               </a:spcAft>
               <a:defRPr sz="1400">
                 <a:solidFill>
-                  <a:srgbClr val="334155"/>
+                  <a:srgbClr val="1E3A5F"/>
                 </a:solidFill>
                 <a:latin typeface="Malgun Gothic"/>
               </a:defRPr>
